--- a/Grupitöö_esitlus.pptx
+++ b/Grupitöö_esitlus.pptx
@@ -19,32 +19,28 @@
     <p:sldId id="276" r:id="rId7"/>
     <p:sldId id="277" r:id="rId8"/>
     <p:sldId id="280" r:id="rId9"/>
-    <p:sldId id="284" r:id="rId10"/>
+    <p:sldId id="272" r:id="rId10"/>
   </p:sldIdLst>
   <p:sldSz cx="18288000" cy="10287000"/>
   <p:notesSz cx="6858000" cy="9144000"/>
   <p:embeddedFontLst>
     <p:embeddedFont>
-      <p:font typeface="Agrandir" panose="020B0604020202020204" charset="0"/>
+      <p:font typeface="Cambria" panose="02040503050406030204" pitchFamily="18" charset="0"/>
       <p:regular r:id="rId13"/>
-    </p:embeddedFont>
-    <p:embeddedFont>
-      <p:font typeface="Cambria" panose="02040503050406030204" pitchFamily="18" charset="0"/>
-      <p:regular r:id="rId14"/>
-      <p:bold r:id="rId15"/>
-      <p:italic r:id="rId16"/>
-      <p:boldItalic r:id="rId17"/>
+      <p:bold r:id="rId14"/>
+      <p:italic r:id="rId15"/>
+      <p:boldItalic r:id="rId16"/>
     </p:embeddedFont>
     <p:embeddedFont>
       <p:font typeface="Maragsa" panose="020B0604020202020204" charset="0"/>
-      <p:regular r:id="rId18"/>
+      <p:regular r:id="rId17"/>
     </p:embeddedFont>
     <p:embeddedFont>
       <p:font typeface="Neue Haas Grotesk Text Pro" panose="020B0504020202020204" pitchFamily="34" charset="0"/>
-      <p:regular r:id="rId19"/>
-      <p:bold r:id="rId20"/>
-      <p:italic r:id="rId21"/>
-      <p:boldItalic r:id="rId22"/>
+      <p:regular r:id="rId18"/>
+      <p:bold r:id="rId19"/>
+      <p:italic r:id="rId20"/>
+      <p:boldItalic r:id="rId21"/>
     </p:embeddedFont>
   </p:embeddedFontLst>
   <p:defaultTextStyle>
@@ -1546,7 +1542,7 @@
       </p:grpSpPr>
       <p:sp>
         <p:nvSpPr>
-          <p:cNvPr id="2" name="Slaidi pildi kohatäide 1"/>
+          <p:cNvPr id="2" name="Slide Image Placeholder 1"/>
           <p:cNvSpPr>
             <a:spLocks noGrp="1" noRot="1" noChangeAspect="1"/>
           </p:cNvSpPr>
@@ -1558,7 +1554,7 @@
       </p:sp>
       <p:sp>
         <p:nvSpPr>
-          <p:cNvPr id="3" name="Märkmete kohatäide 2"/>
+          <p:cNvPr id="3" name="Notes Placeholder 2"/>
           <p:cNvSpPr>
             <a:spLocks noGrp="1"/>
           </p:cNvSpPr>
@@ -1571,18 +1567,21 @@
           <a:bodyPr/>
           <a:lstStyle/>
           <a:p>
-            <a:endParaRPr lang="et-EE" dirty="0"/>
-          </a:p>
-        </p:txBody>
-      </p:sp>
-      <p:sp>
-        <p:nvSpPr>
-          <p:cNvPr id="4" name="Slaidinumbri kohatäide 3"/>
+            <a:r>
+              <a:rPr lang="en-US" dirty="0"/>
+              <a:t>Vasakul kolm rakendust QR-koodidega, paremal projekti GitHubi hoidla.</a:t>
+            </a:r>
+          </a:p>
+        </p:txBody>
+      </p:sp>
+      <p:sp>
+        <p:nvSpPr>
+          <p:cNvPr id="4" name="Slide Number Placeholder 3"/>
           <p:cNvSpPr>
             <a:spLocks noGrp="1"/>
           </p:cNvSpPr>
           <p:nvPr>
-            <p:ph type="sldNum" sz="quarter" idx="5"/>
+            <p:ph type="sldNum" sz="quarter" idx="10"/>
           </p:nvPr>
         </p:nvSpPr>
         <p:spPr/>
@@ -1590,18 +1589,18 @@
           <a:bodyPr/>
           <a:lstStyle/>
           <a:p>
-            <a:fld id="{978B6E92-D574-4550-BB5A-57FD519D2309}" type="slidenum">
-              <a:rPr lang="et-EE" smtClean="0"/>
+            <a:fld id="{F7021451-1387-4CA6-816F-3879F97B5CBC}" type="slidenum">
+              <a:rPr lang="en-US"/>
               <a:t>9</a:t>
             </a:fld>
-            <a:endParaRPr lang="et-EE"/>
+            <a:endParaRPr lang="en-US"/>
           </a:p>
         </p:txBody>
       </p:sp>
     </p:spTree>
     <p:extLst>
       <p:ext uri="{BB962C8B-B14F-4D97-AF65-F5344CB8AC3E}">
-        <p14:creationId xmlns:p14="http://schemas.microsoft.com/office/powerpoint/2010/main" val="223952235"/>
+        <p14:creationId xmlns:p14="http://schemas.microsoft.com/office/powerpoint/2010/main" val="1024086991"/>
       </p:ext>
     </p:extLst>
   </p:cSld>
@@ -8201,7 +8200,7 @@
           </a:prstGeom>
           <a:extLst>
             <a:ext uri="{C572A759-6A51-4108-AA02-DFA0A04FC94B}">
-              <ma14:wrappingTextBoxFlag xmlns="" xmlns:ma14="http://schemas.microsoft.com/office/mac/drawingml/2011/main" val="0"/>
+              <ma14:wrappingTextBoxFlag xmlns:ma14="http://schemas.microsoft.com/office/mac/drawingml/2011/main" xmlns="" val="0"/>
             </a:ext>
           </a:extLst>
         </p:spPr>
@@ -8287,7 +8286,7 @@
           </a:prstGeom>
           <a:extLst>
             <a:ext uri="{C572A759-6A51-4108-AA02-DFA0A04FC94B}">
-              <ma14:wrappingTextBoxFlag xmlns="" xmlns:ma14="http://schemas.microsoft.com/office/mac/drawingml/2011/main" val="0"/>
+              <ma14:wrappingTextBoxFlag xmlns:ma14="http://schemas.microsoft.com/office/mac/drawingml/2011/main" xmlns="" val="0"/>
             </a:ext>
           </a:extLst>
         </p:spPr>
@@ -11727,7 +11726,7 @@
           </a:prstGeom>
           <a:extLst>
             <a:ext uri="{C572A759-6A51-4108-AA02-DFA0A04FC94B}">
-              <ma14:wrappingTextBoxFlag xmlns="" xmlns:ma14="http://schemas.microsoft.com/office/mac/drawingml/2011/main" val="0"/>
+              <ma14:wrappingTextBoxFlag xmlns:ma14="http://schemas.microsoft.com/office/mac/drawingml/2011/main" xmlns="" val="0"/>
             </a:ext>
           </a:extLst>
         </p:spPr>
@@ -13089,7 +13088,7 @@
           </a:prstGeom>
           <a:extLst>
             <a:ext uri="{C572A759-6A51-4108-AA02-DFA0A04FC94B}">
-              <ma14:wrappingTextBoxFlag xmlns="" xmlns:ma14="http://schemas.microsoft.com/office/mac/drawingml/2011/main" val="0"/>
+              <ma14:wrappingTextBoxFlag xmlns:ma14="http://schemas.microsoft.com/office/mac/drawingml/2011/main" xmlns="" val="0"/>
             </a:ext>
           </a:extLst>
         </p:spPr>
@@ -13779,7 +13778,7 @@
           </a:prstGeom>
           <a:extLst>
             <a:ext uri="{C572A759-6A51-4108-AA02-DFA0A04FC94B}">
-              <ma14:wrappingTextBoxFlag xmlns:ma14="http://schemas.microsoft.com/office/mac/drawingml/2011/main" xmlns="" val="0"/>
+              <ma14:wrappingTextBoxFlag xmlns="" xmlns:ma14="http://schemas.microsoft.com/office/mac/drawingml/2011/main" val="0"/>
             </a:ext>
           </a:extLst>
         </p:spPr>
@@ -14989,7 +14988,7 @@
           </a:prstGeom>
           <a:extLst>
             <a:ext uri="{C572A759-6A51-4108-AA02-DFA0A04FC94B}">
-              <ma14:wrappingTextBoxFlag xmlns="" xmlns:ma14="http://schemas.microsoft.com/office/mac/drawingml/2011/main" val="0"/>
+              <ma14:wrappingTextBoxFlag xmlns:ma14="http://schemas.microsoft.com/office/mac/drawingml/2011/main" xmlns="" val="0"/>
             </a:ext>
           </a:extLst>
         </p:spPr>
@@ -15775,7 +15774,7 @@
           </a:prstGeom>
           <a:extLst>
             <a:ext uri="{C572A759-6A51-4108-AA02-DFA0A04FC94B}">
-              <ma14:wrappingTextBoxFlag xmlns="" xmlns:ma14="http://schemas.microsoft.com/office/mac/drawingml/2011/main" val="0"/>
+              <ma14:wrappingTextBoxFlag xmlns:ma14="http://schemas.microsoft.com/office/mac/drawingml/2011/main" xmlns="" val="0"/>
             </a:ext>
           </a:extLst>
         </p:spPr>
@@ -17147,7 +17146,7 @@
           </a:prstGeom>
           <a:extLst>
             <a:ext uri="{C572A759-6A51-4108-AA02-DFA0A04FC94B}">
-              <ma14:wrappingTextBoxFlag xmlns="" xmlns:ma14="http://schemas.microsoft.com/office/mac/drawingml/2011/main" val="0"/>
+              <ma14:wrappingTextBoxFlag xmlns:ma14="http://schemas.microsoft.com/office/mac/drawingml/2011/main" xmlns="" val="0"/>
             </a:ext>
           </a:extLst>
         </p:spPr>
@@ -17950,7 +17949,7 @@
           </a:prstGeom>
           <a:extLst>
             <a:ext uri="{C572A759-6A51-4108-AA02-DFA0A04FC94B}">
-              <ma14:wrappingTextBoxFlag xmlns="" xmlns:ma14="http://schemas.microsoft.com/office/mac/drawingml/2011/main" val="0"/>
+              <ma14:wrappingTextBoxFlag xmlns:ma14="http://schemas.microsoft.com/office/mac/drawingml/2011/main" xmlns="" val="0"/>
             </a:ext>
           </a:extLst>
         </p:spPr>
@@ -20405,7 +20404,7 @@
           </a:prstGeom>
           <a:extLst>
             <a:ext uri="{C572A759-6A51-4108-AA02-DFA0A04FC94B}">
-              <ma14:wrappingTextBoxFlag xmlns="" xmlns:ma14="http://schemas.microsoft.com/office/mac/drawingml/2011/main" val="0"/>
+              <ma14:wrappingTextBoxFlag xmlns:ma14="http://schemas.microsoft.com/office/mac/drawingml/2011/main" xmlns="" val="0"/>
             </a:ext>
           </a:extLst>
         </p:spPr>
@@ -20519,40 +20518,589 @@
       </p:grpSpPr>
       <p:sp>
         <p:nvSpPr>
-          <p:cNvPr id="3" name="TextBox 2">
-            <a:extLst>
-              <a:ext uri="{FF2B5EF4-FFF2-40B4-BE49-F238E27FC236}">
-                <a16:creationId xmlns:a16="http://schemas.microsoft.com/office/drawing/2014/main" id="{A833F29F-BFFC-6197-1692-3C23C91EE09A}"/>
-              </a:ext>
-            </a:extLst>
-          </p:cNvPr>
+          <p:cNvPr id="2" name="Pealkiri"/>
           <p:cNvSpPr txBox="1"/>
           <p:nvPr/>
         </p:nvSpPr>
         <p:spPr>
           <a:xfrm>
-            <a:off x="4419600" y="3188203"/>
-            <a:ext cx="9144000" cy="523157"/>
+            <a:off x="822960" y="548640"/>
+            <a:ext cx="16596360" cy="1303020"/>
           </a:xfrm>
           <a:prstGeom prst="rect">
             <a:avLst/>
           </a:prstGeom>
           <a:noFill/>
-        </p:spPr>
-        <p:txBody>
-          <a:bodyPr wrap="square">
-            <a:spAutoFit/>
-          </a:bodyPr>
-          <a:lstStyle/>
-          <a:p>
-            <a:pPr algn="ctr">
-              <a:lnSpc>
-                <a:spcPts val="3499"/>
-              </a:lnSpc>
-            </a:pPr>
-            <a:r>
-              <a:rPr lang="et-EE" sz="2800" dirty="0">
-                <a:hlinkClick r:id="rId3">
+          <a:ln/>
+        </p:spPr>
+        <p:txBody>
+          <a:bodyPr wrap="square" lIns="0" tIns="0" rIns="0" bIns="0" rtlCol="0" anchor="ctr"/>
+          <a:lstStyle/>
+          <a:p>
+            <a:r>
+              <a:rPr lang="en-US" sz="5100" b="1" dirty="0">
+                <a:solidFill>
+                  <a:srgbClr val="2F2B26"/>
+                </a:solidFill>
+                <a:latin typeface="Cambria" pitchFamily="34" charset="0"/>
+                <a:ea typeface="Cambria" pitchFamily="34" charset="-122"/>
+                <a:cs typeface="Cambria" pitchFamily="34" charset="-120"/>
+              </a:rPr>
+              <a:t>Kus töö asub</a:t>
+            </a:r>
+            <a:endParaRPr lang="en-US" sz="5100" dirty="0"/>
+          </a:p>
+        </p:txBody>
+      </p:sp>
+      <p:pic>
+        <p:nvPicPr>
+          <p:cNvPr id="4" name="Image 0" descr="VALI IT logo"/>
+          <p:cNvPicPr>
+            <a:picLocks noChangeAspect="1"/>
+          </p:cNvPicPr>
+          <p:nvPr/>
+        </p:nvPicPr>
+        <p:blipFill>
+          <a:blip r:embed="rId3"/>
+          <a:stretch>
+            <a:fillRect/>
+          </a:stretch>
+        </p:blipFill>
+        <p:spPr>
+          <a:xfrm>
+            <a:off x="15087600" y="754381"/>
+            <a:ext cx="2331720" cy="812342"/>
+          </a:xfrm>
+          <a:prstGeom prst="rect">
+            <a:avLst/>
+          </a:prstGeom>
+        </p:spPr>
+      </p:pic>
+      <p:sp>
+        <p:nvSpPr>
+          <p:cNvPr id="5" name="Rakenduste paneel"/>
+          <p:cNvSpPr/>
+          <p:nvPr/>
+        </p:nvSpPr>
+        <p:spPr>
+          <a:xfrm>
+            <a:off x="822960" y="2194560"/>
+            <a:ext cx="7132320" cy="7132320"/>
+          </a:xfrm>
+          <a:prstGeom prst="roundRect">
+            <a:avLst>
+              <a:gd name="adj" fmla="val 2308"/>
+            </a:avLst>
+          </a:prstGeom>
+          <a:solidFill>
+            <a:srgbClr val="F7F1E6"/>
+          </a:solidFill>
+          <a:ln w="12700">
+            <a:solidFill>
+              <a:srgbClr val="F7F1E6"/>
+            </a:solidFill>
+            <a:prstDash val="solid"/>
+          </a:ln>
+          <a:effectLst>
+            <a:outerShdw blurRad="101600" dist="25400" dir="5400000" algn="bl" rotWithShape="0">
+              <a:srgbClr val="3A3025">
+                <a:alpha val="15000"/>
+              </a:srgbClr>
+            </a:outerShdw>
+          </a:effectLst>
+        </p:spPr>
+      </p:sp>
+      <p:sp>
+        <p:nvSpPr>
+          <p:cNvPr id="6" name="Text 2"/>
+          <p:cNvSpPr txBox="1"/>
+          <p:nvPr/>
+        </p:nvSpPr>
+        <p:spPr>
+          <a:xfrm>
+            <a:off x="1303020" y="2441448"/>
+            <a:ext cx="6172200" cy="548640"/>
+          </a:xfrm>
+          <a:prstGeom prst="rect">
+            <a:avLst/>
+          </a:prstGeom>
+          <a:noFill/>
+          <a:ln/>
+        </p:spPr>
+        <p:txBody>
+          <a:bodyPr wrap="square" lIns="0" tIns="0" rIns="0" bIns="0" rtlCol="0" anchor="t"/>
+          <a:lstStyle/>
+          <a:p>
+            <a:r>
+              <a:rPr lang="en-US" sz="2700" b="1" dirty="0">
+                <a:solidFill>
+                  <a:srgbClr val="5C5346"/>
+                </a:solidFill>
+                <a:latin typeface="Cambria" pitchFamily="34" charset="0"/>
+                <a:ea typeface="Cambria" pitchFamily="34" charset="-122"/>
+                <a:cs typeface="Cambria" pitchFamily="34" charset="-120"/>
+              </a:rPr>
+              <a:t>Rakendused</a:t>
+            </a:r>
+            <a:endParaRPr lang="en-US" sz="2700" dirty="0"/>
+          </a:p>
+        </p:txBody>
+      </p:sp>
+      <p:sp>
+        <p:nvSpPr>
+          <p:cNvPr id="7" name="QR raam"/>
+          <p:cNvSpPr/>
+          <p:nvPr/>
+        </p:nvSpPr>
+        <p:spPr>
+          <a:xfrm>
+            <a:off x="1303020" y="3154680"/>
+            <a:ext cx="1714500" cy="1714500"/>
+          </a:xfrm>
+          <a:prstGeom prst="roundRect">
+            <a:avLst>
+              <a:gd name="adj" fmla="val 4800"/>
+            </a:avLst>
+          </a:prstGeom>
+          <a:solidFill>
+            <a:srgbClr val="FFFFFF"/>
+          </a:solidFill>
+          <a:ln w="12700">
+            <a:solidFill>
+              <a:srgbClr val="E5D8C0"/>
+            </a:solidFill>
+            <a:prstDash val="solid"/>
+          </a:ln>
+        </p:spPr>
+      </p:sp>
+      <p:pic>
+        <p:nvPicPr>
+          <p:cNvPr id="8" name="Image 1" descr="QR-kood: Kinnisvarahindade ostujõu indeks"/>
+          <p:cNvPicPr>
+            <a:picLocks noChangeAspect="1"/>
+          </p:cNvPicPr>
+          <p:nvPr/>
+        </p:nvPicPr>
+        <p:blipFill>
+          <a:blip r:embed="rId4"/>
+          <a:stretch>
+            <a:fillRect/>
+          </a:stretch>
+        </p:blipFill>
+        <p:spPr>
+          <a:xfrm>
+            <a:off x="1412748" y="3264408"/>
+            <a:ext cx="1495044" cy="1495044"/>
+          </a:xfrm>
+          <a:prstGeom prst="rect">
+            <a:avLst/>
+          </a:prstGeom>
+        </p:spPr>
+      </p:pic>
+      <p:sp>
+        <p:nvSpPr>
+          <p:cNvPr id="9" name="Text 4"/>
+          <p:cNvSpPr txBox="1"/>
+          <p:nvPr/>
+        </p:nvSpPr>
+        <p:spPr>
+          <a:xfrm>
+            <a:off x="3360420" y="3154680"/>
+            <a:ext cx="4389120" cy="1714500"/>
+          </a:xfrm>
+          <a:prstGeom prst="rect">
+            <a:avLst/>
+          </a:prstGeom>
+          <a:noFill/>
+          <a:ln/>
+        </p:spPr>
+        <p:txBody>
+          <a:bodyPr wrap="square" lIns="0" tIns="0" rIns="0" bIns="0" rtlCol="0" anchor="ctr"/>
+          <a:lstStyle/>
+          <a:p>
+            <a:r>
+              <a:rPr lang="en-US" sz="2400" b="1" dirty="0">
+                <a:solidFill>
+                  <a:srgbClr val="2F2B26"/>
+                </a:solidFill>
+                <a:latin typeface="Calibri" pitchFamily="34" charset="0"/>
+                <a:ea typeface="Calibri" pitchFamily="34" charset="-122"/>
+                <a:cs typeface="Calibri" pitchFamily="34" charset="-120"/>
+              </a:rPr>
+              <a:t>Kinnisvarahindade ostujõu indeks</a:t>
+            </a:r>
+            <a:endParaRPr lang="en-US" sz="2400" dirty="0"/>
+          </a:p>
+        </p:txBody>
+      </p:sp>
+      <p:sp>
+        <p:nvSpPr>
+          <p:cNvPr id="10" name="Eraldusjoon"/>
+          <p:cNvSpPr/>
+          <p:nvPr/>
+        </p:nvSpPr>
+        <p:spPr>
+          <a:xfrm>
+            <a:off x="1303020" y="5074920"/>
+            <a:ext cx="6172200" cy="0"/>
+          </a:xfrm>
+          <a:prstGeom prst="line">
+            <a:avLst/>
+          </a:prstGeom>
+          <a:noFill/>
+          <a:ln w="12700">
+            <a:solidFill>
+              <a:srgbClr val="D8C3A0"/>
+            </a:solidFill>
+            <a:prstDash val="solid"/>
+          </a:ln>
+        </p:spPr>
+      </p:sp>
+      <p:sp>
+        <p:nvSpPr>
+          <p:cNvPr id="11" name="QR raam"/>
+          <p:cNvSpPr/>
+          <p:nvPr/>
+        </p:nvSpPr>
+        <p:spPr>
+          <a:xfrm>
+            <a:off x="1303020" y="5212080"/>
+            <a:ext cx="1714500" cy="1714500"/>
+          </a:xfrm>
+          <a:prstGeom prst="roundRect">
+            <a:avLst>
+              <a:gd name="adj" fmla="val 4800"/>
+            </a:avLst>
+          </a:prstGeom>
+          <a:solidFill>
+            <a:srgbClr val="FFFFFF"/>
+          </a:solidFill>
+          <a:ln w="12700">
+            <a:solidFill>
+              <a:srgbClr val="E5D8C0"/>
+            </a:solidFill>
+            <a:prstDash val="solid"/>
+          </a:ln>
+        </p:spPr>
+      </p:sp>
+      <p:pic>
+        <p:nvPicPr>
+          <p:cNvPr id="12" name="Image 2" descr="QR-kood: Eesti kinnisvara ostujõu kompass"/>
+          <p:cNvPicPr>
+            <a:picLocks noChangeAspect="1"/>
+          </p:cNvPicPr>
+          <p:nvPr/>
+        </p:nvPicPr>
+        <p:blipFill>
+          <a:blip r:embed="rId5"/>
+          <a:stretch>
+            <a:fillRect/>
+          </a:stretch>
+        </p:blipFill>
+        <p:spPr>
+          <a:xfrm>
+            <a:off x="1412748" y="5321808"/>
+            <a:ext cx="1495044" cy="1495044"/>
+          </a:xfrm>
+          <a:prstGeom prst="rect">
+            <a:avLst/>
+          </a:prstGeom>
+        </p:spPr>
+      </p:pic>
+      <p:sp>
+        <p:nvSpPr>
+          <p:cNvPr id="13" name="Text 7"/>
+          <p:cNvSpPr txBox="1"/>
+          <p:nvPr/>
+        </p:nvSpPr>
+        <p:spPr>
+          <a:xfrm>
+            <a:off x="3360420" y="5212080"/>
+            <a:ext cx="4389120" cy="1714500"/>
+          </a:xfrm>
+          <a:prstGeom prst="rect">
+            <a:avLst/>
+          </a:prstGeom>
+          <a:noFill/>
+          <a:ln/>
+        </p:spPr>
+        <p:txBody>
+          <a:bodyPr wrap="square" lIns="0" tIns="0" rIns="0" bIns="0" rtlCol="0" anchor="ctr"/>
+          <a:lstStyle/>
+          <a:p>
+            <a:r>
+              <a:rPr lang="en-US" sz="2400" b="1" dirty="0">
+                <a:solidFill>
+                  <a:srgbClr val="2F2B26"/>
+                </a:solidFill>
+                <a:latin typeface="Calibri" pitchFamily="34" charset="0"/>
+                <a:ea typeface="Calibri" pitchFamily="34" charset="-122"/>
+                <a:cs typeface="Calibri" pitchFamily="34" charset="-120"/>
+              </a:rPr>
+              <a:t>Eesti kinnisvara ostujõu kompass</a:t>
+            </a:r>
+            <a:endParaRPr lang="en-US" sz="2400" dirty="0"/>
+          </a:p>
+        </p:txBody>
+      </p:sp>
+      <p:sp>
+        <p:nvSpPr>
+          <p:cNvPr id="14" name="Eraldusjoon"/>
+          <p:cNvSpPr/>
+          <p:nvPr/>
+        </p:nvSpPr>
+        <p:spPr>
+          <a:xfrm>
+            <a:off x="1303020" y="7132320"/>
+            <a:ext cx="6172200" cy="0"/>
+          </a:xfrm>
+          <a:prstGeom prst="line">
+            <a:avLst/>
+          </a:prstGeom>
+          <a:noFill/>
+          <a:ln w="12700">
+            <a:solidFill>
+              <a:srgbClr val="D8C3A0"/>
+            </a:solidFill>
+            <a:prstDash val="solid"/>
+          </a:ln>
+        </p:spPr>
+      </p:sp>
+      <p:sp>
+        <p:nvSpPr>
+          <p:cNvPr id="15" name="QR raam"/>
+          <p:cNvSpPr/>
+          <p:nvPr/>
+        </p:nvSpPr>
+        <p:spPr>
+          <a:xfrm>
+            <a:off x="1303020" y="7269480"/>
+            <a:ext cx="1714500" cy="1714500"/>
+          </a:xfrm>
+          <a:prstGeom prst="roundRect">
+            <a:avLst>
+              <a:gd name="adj" fmla="val 4800"/>
+            </a:avLst>
+          </a:prstGeom>
+          <a:solidFill>
+            <a:srgbClr val="FFFFFF"/>
+          </a:solidFill>
+          <a:ln w="12700">
+            <a:solidFill>
+              <a:srgbClr val="E5D8C0"/>
+            </a:solidFill>
+            <a:prstDash val="solid"/>
+          </a:ln>
+        </p:spPr>
+      </p:sp>
+      <p:pic>
+        <p:nvPicPr>
+          <p:cNvPr id="16" name="Image 3" descr="QR-kood: Kinnisvaraturu analüüs"/>
+          <p:cNvPicPr>
+            <a:picLocks noChangeAspect="1"/>
+          </p:cNvPicPr>
+          <p:nvPr/>
+        </p:nvPicPr>
+        <p:blipFill>
+          <a:blip r:embed="rId6"/>
+          <a:stretch>
+            <a:fillRect/>
+          </a:stretch>
+        </p:blipFill>
+        <p:spPr>
+          <a:xfrm>
+            <a:off x="1412748" y="7379208"/>
+            <a:ext cx="1495044" cy="1495044"/>
+          </a:xfrm>
+          <a:prstGeom prst="rect">
+            <a:avLst/>
+          </a:prstGeom>
+        </p:spPr>
+      </p:pic>
+      <p:sp>
+        <p:nvSpPr>
+          <p:cNvPr id="17" name="Text 10"/>
+          <p:cNvSpPr txBox="1"/>
+          <p:nvPr/>
+        </p:nvSpPr>
+        <p:spPr>
+          <a:xfrm>
+            <a:off x="3360420" y="7269480"/>
+            <a:ext cx="4389120" cy="1714500"/>
+          </a:xfrm>
+          <a:prstGeom prst="rect">
+            <a:avLst/>
+          </a:prstGeom>
+          <a:noFill/>
+          <a:ln/>
+        </p:spPr>
+        <p:txBody>
+          <a:bodyPr wrap="square" lIns="0" tIns="0" rIns="0" bIns="0" rtlCol="0" anchor="ctr"/>
+          <a:lstStyle/>
+          <a:p>
+            <a:r>
+              <a:rPr lang="en-US" sz="2400" b="1" dirty="0">
+                <a:solidFill>
+                  <a:srgbClr val="2F2B26"/>
+                </a:solidFill>
+                <a:latin typeface="Calibri" pitchFamily="34" charset="0"/>
+                <a:ea typeface="Calibri" pitchFamily="34" charset="-122"/>
+                <a:cs typeface="Calibri" pitchFamily="34" charset="-120"/>
+              </a:rPr>
+              <a:t>Kinnisvaraturu analüüs</a:t>
+            </a:r>
+            <a:endParaRPr lang="en-US" sz="2400" dirty="0"/>
+          </a:p>
+        </p:txBody>
+      </p:sp>
+      <p:sp>
+        <p:nvSpPr>
+          <p:cNvPr id="18" name="Põhikoodi paneel"/>
+          <p:cNvSpPr/>
+          <p:nvPr/>
+        </p:nvSpPr>
+        <p:spPr>
+          <a:xfrm>
+            <a:off x="8366760" y="2194560"/>
+            <a:ext cx="9052560" cy="7132320"/>
+          </a:xfrm>
+          <a:prstGeom prst="roundRect">
+            <a:avLst>
+              <a:gd name="adj" fmla="val 2308"/>
+            </a:avLst>
+          </a:prstGeom>
+          <a:solidFill>
+            <a:srgbClr val="FFFFFF"/>
+          </a:solidFill>
+          <a:ln w="12700">
+            <a:solidFill>
+              <a:srgbClr val="E5D8C0"/>
+            </a:solidFill>
+            <a:prstDash val="solid"/>
+          </a:ln>
+        </p:spPr>
+      </p:sp>
+      <p:sp>
+        <p:nvSpPr>
+          <p:cNvPr id="19" name="Text 12"/>
+          <p:cNvSpPr txBox="1"/>
+          <p:nvPr/>
+        </p:nvSpPr>
+        <p:spPr>
+          <a:xfrm>
+            <a:off x="8366760" y="2441448"/>
+            <a:ext cx="9052560" cy="548640"/>
+          </a:xfrm>
+          <a:prstGeom prst="rect">
+            <a:avLst/>
+          </a:prstGeom>
+          <a:noFill/>
+          <a:ln/>
+        </p:spPr>
+        <p:txBody>
+          <a:bodyPr wrap="square" lIns="0" tIns="0" rIns="0" bIns="0" rtlCol="0" anchor="t"/>
+          <a:lstStyle/>
+          <a:p>
+            <a:pPr algn="ctr"/>
+            <a:r>
+              <a:rPr lang="en-US" sz="2700" b="1" dirty="0">
+                <a:solidFill>
+                  <a:srgbClr val="5C5346"/>
+                </a:solidFill>
+                <a:latin typeface="Cambria" pitchFamily="34" charset="0"/>
+                <a:ea typeface="Cambria" pitchFamily="34" charset="-122"/>
+                <a:cs typeface="Cambria" pitchFamily="34" charset="-120"/>
+              </a:rPr>
+              <a:t>Projekti kood GitHubis</a:t>
+            </a:r>
+            <a:endParaRPr lang="en-US" sz="2700" dirty="0"/>
+          </a:p>
+        </p:txBody>
+      </p:sp>
+      <p:sp>
+        <p:nvSpPr>
+          <p:cNvPr id="20" name="Põhi-QR raam"/>
+          <p:cNvSpPr/>
+          <p:nvPr/>
+        </p:nvSpPr>
+        <p:spPr>
+          <a:xfrm>
+            <a:off x="11109960" y="3154680"/>
+            <a:ext cx="3566160" cy="3566160"/>
+          </a:xfrm>
+          <a:prstGeom prst="roundRect">
+            <a:avLst>
+              <a:gd name="adj" fmla="val 3077"/>
+            </a:avLst>
+          </a:prstGeom>
+          <a:solidFill>
+            <a:srgbClr val="FFFFFF"/>
+          </a:solidFill>
+          <a:ln w="19050">
+            <a:solidFill>
+              <a:srgbClr val="D8C3A0"/>
+            </a:solidFill>
+            <a:prstDash val="solid"/>
+          </a:ln>
+        </p:spPr>
+      </p:sp>
+      <p:pic>
+        <p:nvPicPr>
+          <p:cNvPr id="21" name="Image 4" descr="QR-kood GitHubi hoidlale"/>
+          <p:cNvPicPr>
+            <a:picLocks noChangeAspect="1"/>
+          </p:cNvPicPr>
+          <p:nvPr/>
+        </p:nvPicPr>
+        <p:blipFill>
+          <a:blip r:embed="rId7"/>
+          <a:stretch>
+            <a:fillRect/>
+          </a:stretch>
+        </p:blipFill>
+        <p:spPr>
+          <a:xfrm>
+            <a:off x="11247120" y="3291840"/>
+            <a:ext cx="3291840" cy="3291840"/>
+          </a:xfrm>
+          <a:prstGeom prst="rect">
+            <a:avLst/>
+          </a:prstGeom>
+        </p:spPr>
+      </p:pic>
+      <p:sp>
+        <p:nvSpPr>
+          <p:cNvPr id="22" name="Text 14">
+            <a:hlinkClick r:id="rId8"/>
+          </p:cNvPr>
+          <p:cNvSpPr txBox="1"/>
+          <p:nvPr/>
+        </p:nvSpPr>
+        <p:spPr>
+          <a:xfrm>
+            <a:off x="8366760" y="6995160"/>
+            <a:ext cx="9052560" cy="617220"/>
+          </a:xfrm>
+          <a:prstGeom prst="rect">
+            <a:avLst/>
+          </a:prstGeom>
+          <a:noFill/>
+          <a:ln/>
+        </p:spPr>
+        <p:txBody>
+          <a:bodyPr wrap="square" lIns="0" tIns="0" rIns="0" bIns="0" rtlCol="0" anchor="ctr"/>
+          <a:lstStyle/>
+          <a:p>
+            <a:pPr algn="ctr"/>
+            <a:r>
+              <a:rPr lang="en-US" sz="2400" u="sng" dirty="0">
+                <a:solidFill>
+                  <a:srgbClr val="5C5346"/>
+                </a:solidFill>
+                <a:latin typeface="Calibri" pitchFamily="34" charset="0"/>
+                <a:ea typeface="Calibri" pitchFamily="34" charset="-122"/>
+                <a:cs typeface="Calibri" pitchFamily="34" charset="-120"/>
+                <a:hlinkClick r:id="rId8">
                   <a:extLst>
                     <a:ext uri="{A12FA001-AC4F-418D-AE19-62706E023703}">
                       <ahyp:hlinkClr xmlns:ahyp="http://schemas.microsoft.com/office/drawing/2018/hyperlinkcolor" val="tx"/>
@@ -20560,122 +21108,52 @@
                   </a:extLst>
                 </a:hlinkClick>
               </a:rPr>
-              <a:t>Github.com/kaidisoiela/Grupitoo_kinnisvara</a:t>
-            </a:r>
-            <a:endParaRPr lang="en-US" sz="2499" dirty="0">
-              <a:latin typeface="Agrandir"/>
-              <a:ea typeface="Agrandir"/>
-              <a:cs typeface="Agrandir"/>
-              <a:sym typeface="Agrandir"/>
-            </a:endParaRPr>
-          </a:p>
-        </p:txBody>
-      </p:sp>
-      <p:sp>
-        <p:nvSpPr>
-          <p:cNvPr id="7" name="TextBox 6">
-            <a:extLst>
-              <a:ext uri="{FF2B5EF4-FFF2-40B4-BE49-F238E27FC236}">
-                <a16:creationId xmlns:a16="http://schemas.microsoft.com/office/drawing/2014/main" id="{097AECAB-A400-3193-0EB3-464E66024273}"/>
-              </a:ext>
-            </a:extLst>
-          </p:cNvPr>
+              <a:t>github.com/kaidisoiela/Grupitoo_kinnisvara</a:t>
+            </a:r>
+            <a:endParaRPr lang="en-US" sz="2400" dirty="0"/>
+          </a:p>
+        </p:txBody>
+      </p:sp>
+      <p:sp>
+        <p:nvSpPr>
+          <p:cNvPr id="23" name="Text 15"/>
           <p:cNvSpPr txBox="1"/>
           <p:nvPr/>
         </p:nvSpPr>
         <p:spPr>
           <a:xfrm>
-            <a:off x="4391891" y="1926734"/>
-            <a:ext cx="9144000" cy="1145378"/>
+            <a:off x="8366760" y="7955280"/>
+            <a:ext cx="9052560" cy="1028700"/>
           </a:xfrm>
           <a:prstGeom prst="rect">
             <a:avLst/>
           </a:prstGeom>
           <a:noFill/>
-        </p:spPr>
-        <p:txBody>
-          <a:bodyPr wrap="square">
-            <a:spAutoFit/>
-          </a:bodyPr>
-          <a:lstStyle/>
-          <a:p>
-            <a:pPr algn="ctr">
-              <a:lnSpc>
-                <a:spcPts val="8997"/>
-              </a:lnSpc>
-              <a:spcBef>
-                <a:spcPct val="0"/>
-              </a:spcBef>
-            </a:pPr>
-            <a:r>
-              <a:rPr lang="en-US" sz="6427" dirty="0">
-                <a:latin typeface="Cambria" panose="02040503050406030204" pitchFamily="18" charset="0"/>
-                <a:ea typeface="Cambria" panose="02040503050406030204" pitchFamily="18" charset="0"/>
-                <a:cs typeface="Maragsa"/>
-                <a:sym typeface="Maragsa"/>
+          <a:ln/>
+        </p:spPr>
+        <p:txBody>
+          <a:bodyPr wrap="square" lIns="0" tIns="0" rIns="0" bIns="0" rtlCol="0" anchor="ctr"/>
+          <a:lstStyle/>
+          <a:p>
+            <a:pPr algn="ctr"/>
+            <a:r>
+              <a:rPr lang="en-US" sz="5400" b="1" dirty="0">
+                <a:solidFill>
+                  <a:srgbClr val="2F2B26"/>
+                </a:solidFill>
+                <a:latin typeface="Cambria" pitchFamily="34" charset="0"/>
+                <a:ea typeface="Cambria" pitchFamily="34" charset="-122"/>
+                <a:cs typeface="Cambria" pitchFamily="34" charset="-120"/>
               </a:rPr>
-              <a:t>KUS TÖÖ ASUB</a:t>
-            </a:r>
-          </a:p>
-        </p:txBody>
-      </p:sp>
-      <p:sp>
-        <p:nvSpPr>
-          <p:cNvPr id="9" name="TextBox 8">
-            <a:extLst>
-              <a:ext uri="{FF2B5EF4-FFF2-40B4-BE49-F238E27FC236}">
-                <a16:creationId xmlns:a16="http://schemas.microsoft.com/office/drawing/2014/main" id="{2DD9ECDB-ECE5-7BCB-6EF6-05DFC5F3E861}"/>
-              </a:ext>
-            </a:extLst>
-          </p:cNvPr>
-          <p:cNvSpPr txBox="1"/>
-          <p:nvPr/>
-        </p:nvSpPr>
-        <p:spPr>
-          <a:xfrm>
-            <a:off x="4267200" y="4022817"/>
-            <a:ext cx="9144000" cy="595612"/>
-          </a:xfrm>
-          <a:prstGeom prst="rect">
-            <a:avLst/>
-          </a:prstGeom>
-          <a:noFill/>
-        </p:spPr>
-        <p:txBody>
-          <a:bodyPr wrap="square">
-            <a:spAutoFit/>
-          </a:bodyPr>
-          <a:lstStyle/>
-          <a:p>
-            <a:pPr algn="ctr">
-              <a:lnSpc>
-                <a:spcPts val="4200"/>
-              </a:lnSpc>
-              <a:spcBef>
-                <a:spcPct val="0"/>
-              </a:spcBef>
-            </a:pPr>
-            <a:r>
-              <a:rPr lang="et-EE" sz="3000" b="1" noProof="0" dirty="0">
-                <a:latin typeface="Cambria" panose="02040503050406030204" pitchFamily="18" charset="0"/>
-                <a:ea typeface="Cambria" panose="02040503050406030204" pitchFamily="18" charset="0"/>
-                <a:cs typeface="Open Sans Bold"/>
-                <a:sym typeface="Open Sans Bold"/>
-              </a:rPr>
-              <a:t>Aitäh! </a:t>
-            </a:r>
-          </a:p>
-        </p:txBody>
-      </p:sp>
-      <p:sp>
-        <p:nvSpPr>
-          <p:cNvPr id="12" name="Slaidinumbri kohatäide 11">
-            <a:extLst>
-              <a:ext uri="{FF2B5EF4-FFF2-40B4-BE49-F238E27FC236}">
-                <a16:creationId xmlns:a16="http://schemas.microsoft.com/office/drawing/2014/main" id="{5EA7084C-B80F-26C8-AA4C-0F8246D7269B}"/>
-              </a:ext>
-            </a:extLst>
-          </p:cNvPr>
+              <a:t>Aitäh!</a:t>
+            </a:r>
+            <a:endParaRPr lang="en-US" sz="5400" dirty="0"/>
+          </a:p>
+        </p:txBody>
+      </p:sp>
+      <p:sp>
+        <p:nvSpPr>
+          <p:cNvPr id="25" name="Slide Number Placeholder 0"/>
           <p:cNvSpPr>
             <a:spLocks noGrp="1"/>
           </p:cNvSpPr>
@@ -20683,121 +21161,45 @@
             <p:ph type="sldNum" sz="quarter" idx="4294967295"/>
           </p:nvPr>
         </p:nvSpPr>
-        <p:spPr/>
-        <p:txBody>
-          <a:bodyPr/>
-          <a:lstStyle/>
+        <p:spPr>
+          <a:xfrm>
+            <a:off x="16596360" y="9601200"/>
+            <a:ext cx="822960" cy="411480"/>
+          </a:xfrm>
+          <a:prstGeom prst="rect">
+            <a:avLst/>
+          </a:prstGeom>
+          <a:extLst>
+            <a:ext uri="{C572A759-6A51-4108-AA02-DFA0A04FC94B}">
+              <ma14:wrappingTextBoxFlag xmlns="" xmlns:ma14="http://schemas.microsoft.com/office/mac/drawingml/2011/main" val="0"/>
+            </a:ext>
+          </a:extLst>
+        </p:spPr>
+        <p:txBody>
+          <a:bodyPr/>
+          <a:lstStyle>
+            <a:lvl1pPr>
+              <a:defRPr sz="1500">
+                <a:solidFill>
+                  <a:srgbClr val="6B6459"/>
+                </a:solidFill>
+                <a:latin typeface="Calibri"/>
+                <a:ea typeface="Calibri"/>
+                <a:cs typeface="Calibri"/>
+              </a:defRPr>
+            </a:lvl1pPr>
+          </a:lstStyle>
           <a:p>
             <a:pPr algn="r"/>
             <a:fld id="{F7021451-1387-4CA6-816F-3879F97B5CBC}" type="slidenum">
-              <a:rPr lang="en-US" b="0" smtClean="0"/>
+              <a:rPr lang="en-US" b="0"/>
               <a:t>9</a:t>
             </a:fld>
             <a:endParaRPr lang="en-US"/>
           </a:p>
         </p:txBody>
       </p:sp>
-      <p:sp>
-        <p:nvSpPr>
-          <p:cNvPr id="19" name="Freeform 11">
-            <a:extLst>
-              <a:ext uri="{FF2B5EF4-FFF2-40B4-BE49-F238E27FC236}">
-                <a16:creationId xmlns:a16="http://schemas.microsoft.com/office/drawing/2014/main" id="{AE5C2753-28E5-44E1-CB63-777950D31127}"/>
-              </a:ext>
-            </a:extLst>
-          </p:cNvPr>
-          <p:cNvSpPr/>
-          <p:nvPr/>
-        </p:nvSpPr>
-        <p:spPr>
-          <a:xfrm>
-            <a:off x="13757564" y="376046"/>
-            <a:ext cx="4344503" cy="3073736"/>
-          </a:xfrm>
-          <a:custGeom>
-            <a:avLst/>
-            <a:gdLst/>
-            <a:ahLst/>
-            <a:cxnLst/>
-            <a:rect l="l" t="t" r="r" b="b"/>
-            <a:pathLst>
-              <a:path w="4344503" h="3073736">
-                <a:moveTo>
-                  <a:pt x="0" y="0"/>
-                </a:moveTo>
-                <a:lnTo>
-                  <a:pt x="4344503" y="0"/>
-                </a:lnTo>
-                <a:lnTo>
-                  <a:pt x="4344503" y="3073736"/>
-                </a:lnTo>
-                <a:lnTo>
-                  <a:pt x="0" y="3073736"/>
-                </a:lnTo>
-                <a:lnTo>
-                  <a:pt x="0" y="0"/>
-                </a:lnTo>
-                <a:close/>
-              </a:path>
-            </a:pathLst>
-          </a:custGeom>
-          <a:blipFill>
-            <a:blip r:embed="rId4"/>
-            <a:stretch>
-              <a:fillRect/>
-            </a:stretch>
-          </a:blipFill>
-        </p:spPr>
-        <p:txBody>
-          <a:bodyPr/>
-          <a:lstStyle/>
-          <a:p>
-            <a:endParaRPr lang="et-EE"/>
-          </a:p>
-        </p:txBody>
-      </p:sp>
-      <p:pic>
-        <p:nvPicPr>
-          <p:cNvPr id="4" name="Picture 3">
-            <a:extLst>
-              <a:ext uri="{FF2B5EF4-FFF2-40B4-BE49-F238E27FC236}">
-                <a16:creationId xmlns:a16="http://schemas.microsoft.com/office/drawing/2014/main" id="{3A835B85-6B3D-6A5E-279A-B885989F0845}"/>
-              </a:ext>
-            </a:extLst>
-          </p:cNvPr>
-          <p:cNvPicPr>
-            <a:picLocks noChangeAspect="1"/>
-          </p:cNvPicPr>
-          <p:nvPr/>
-        </p:nvPicPr>
-        <p:blipFill>
-          <a:blip r:embed="rId5" cstate="print">
-            <a:extLst>
-              <a:ext uri="{28A0092B-C50C-407E-A947-70E740481C1C}">
-                <a14:useLocalDpi xmlns:a14="http://schemas.microsoft.com/office/drawing/2010/main" val="0"/>
-              </a:ext>
-            </a:extLst>
-          </a:blip>
-          <a:stretch>
-            <a:fillRect/>
-          </a:stretch>
-        </p:blipFill>
-        <p:spPr>
-          <a:xfrm>
-            <a:off x="7048500" y="5140036"/>
-            <a:ext cx="3886200" cy="3886200"/>
-          </a:xfrm>
-          <a:prstGeom prst="rect">
-            <a:avLst/>
-          </a:prstGeom>
-        </p:spPr>
-      </p:pic>
     </p:spTree>
-    <p:extLst>
-      <p:ext uri="{BB962C8B-B14F-4D97-AF65-F5344CB8AC3E}">
-        <p14:creationId xmlns:p14="http://schemas.microsoft.com/office/powerpoint/2010/main" val="3044010132"/>
-      </p:ext>
-    </p:extLst>
   </p:cSld>
   <p:clrMapOvr>
     <a:masterClrMapping/>

--- a/Grupitöö_esitlus.pptx
+++ b/Grupitöö_esitlus.pptx
@@ -257,7 +257,7 @@
           <a:p>
             <a:fld id="{954E3B54-E8B8-4D2F-9093-C38B63E1A623}" type="datetimeFigureOut">
               <a:rPr lang="et-EE" smtClean="0"/>
-              <a:t>08.10.2026</a:t>
+              <a:t>09.10.2026</a:t>
             </a:fld>
             <a:endParaRPr lang="et-EE"/>
           </a:p>
@@ -435,7 +435,7 @@
           <a:p>
             <a:fld id="{F435B479-238C-4084-A020-7C85E92EBEF7}" type="datetimeFigureOut">
               <a:rPr lang="et-EE" smtClean="0"/>
-              <a:t>08.10.2026</a:t>
+              <a:t>09.10.2026</a:t>
             </a:fld>
             <a:endParaRPr lang="et-EE"/>
           </a:p>
@@ -8200,7 +8200,7 @@
           </a:prstGeom>
           <a:extLst>
             <a:ext uri="{C572A759-6A51-4108-AA02-DFA0A04FC94B}">
-              <ma14:wrappingTextBoxFlag xmlns:ma14="http://schemas.microsoft.com/office/mac/drawingml/2011/main" xmlns="" val="0"/>
+              <ma14:wrappingTextBoxFlag xmlns="" xmlns:ma14="http://schemas.microsoft.com/office/mac/drawingml/2011/main" val="0"/>
             </a:ext>
           </a:extLst>
         </p:spPr>
@@ -8286,7 +8286,7 @@
           </a:prstGeom>
           <a:extLst>
             <a:ext uri="{C572A759-6A51-4108-AA02-DFA0A04FC94B}">
-              <ma14:wrappingTextBoxFlag xmlns:ma14="http://schemas.microsoft.com/office/mac/drawingml/2011/main" xmlns="" val="0"/>
+              <ma14:wrappingTextBoxFlag xmlns="" xmlns:ma14="http://schemas.microsoft.com/office/mac/drawingml/2011/main" val="0"/>
             </a:ext>
           </a:extLst>
         </p:spPr>
@@ -11726,7 +11726,7 @@
           </a:prstGeom>
           <a:extLst>
             <a:ext uri="{C572A759-6A51-4108-AA02-DFA0A04FC94B}">
-              <ma14:wrappingTextBoxFlag xmlns:ma14="http://schemas.microsoft.com/office/mac/drawingml/2011/main" xmlns="" val="0"/>
+              <ma14:wrappingTextBoxFlag xmlns="" xmlns:ma14="http://schemas.microsoft.com/office/mac/drawingml/2011/main" val="0"/>
             </a:ext>
           </a:extLst>
         </p:spPr>
@@ -12043,8 +12043,8 @@
         </p:blipFill>
         <p:spPr>
           <a:xfrm>
-            <a:off x="868680" y="3497580"/>
-            <a:ext cx="3794760" cy="3779520"/>
+            <a:off x="778578" y="3513908"/>
+            <a:ext cx="3929244" cy="3851593"/>
           </a:xfrm>
           <a:prstGeom prst="rect">
             <a:avLst/>
@@ -12347,7 +12347,7 @@
         <p:spPr>
           <a:xfrm>
             <a:off x="5074920" y="3497580"/>
-            <a:ext cx="3840480" cy="3840480"/>
+            <a:ext cx="3884862" cy="3884862"/>
           </a:xfrm>
           <a:prstGeom prst="rect">
             <a:avLst/>
@@ -12557,19 +12557,16 @@
                 <a:cs typeface="Maragsa"/>
                 <a:sym typeface="Maragsa"/>
               </a:rPr>
-              <a:t>Aspiring Data Analyst | SQL, Power BI, Excel, SAP | Turning 5+ Years of Operations Data </a:t>
-            </a:r>
-            <a:r>
-              <a:rPr lang="en-US" sz="2000" dirty="0">
-                <a:solidFill>
-                  <a:srgbClr val="000000"/>
-                </a:solidFill>
-                <a:ea typeface="Maragsa"/>
-                <a:cs typeface="Maragsa"/>
-                <a:sym typeface="Maragsa"/>
-              </a:rPr>
-              <a:t>into Insights</a:t>
-            </a:r>
+              <a:t>Aspiring Data Analyst | SQL, Power BI, Excel, SAP </a:t>
+            </a:r>
+            <a:endParaRPr lang="en-US" sz="2000" dirty="0">
+              <a:solidFill>
+                <a:srgbClr val="000000"/>
+              </a:solidFill>
+              <a:ea typeface="Maragsa"/>
+              <a:cs typeface="Maragsa"/>
+              <a:sym typeface="Maragsa"/>
+            </a:endParaRPr>
           </a:p>
         </p:txBody>
       </p:sp>
@@ -12660,8 +12657,8 @@
         </p:blipFill>
         <p:spPr>
           <a:xfrm>
-            <a:off x="9372602" y="3513909"/>
-            <a:ext cx="3779520" cy="3840480"/>
+            <a:off x="9326879" y="3513908"/>
+            <a:ext cx="3840480" cy="3902423"/>
           </a:xfrm>
           <a:prstGeom prst="rect">
             <a:avLst/>
@@ -12677,7 +12674,7 @@
         </p:nvSpPr>
         <p:spPr>
           <a:xfrm>
-            <a:off x="9326880" y="6309360"/>
+            <a:off x="9281158" y="6271804"/>
             <a:ext cx="3840480" cy="548640"/>
           </a:xfrm>
           <a:prstGeom prst="rect">
@@ -12871,7 +12868,7 @@
                 <a:cs typeface="Maragsa"/>
                 <a:sym typeface="Maragsa"/>
               </a:rPr>
-              <a:t>Data &amp; Business Intelligence Analyst  Customer Experience &amp; Operations </a:t>
+              <a:t>Data &amp; Business Intelligence Analyst | Customer Experience</a:t>
             </a:r>
           </a:p>
         </p:txBody>
@@ -13088,7 +13085,7 @@
           </a:prstGeom>
           <a:extLst>
             <a:ext uri="{C572A759-6A51-4108-AA02-DFA0A04FC94B}">
-              <ma14:wrappingTextBoxFlag xmlns:ma14="http://schemas.microsoft.com/office/mac/drawingml/2011/main" xmlns="" val="0"/>
+              <ma14:wrappingTextBoxFlag xmlns="" xmlns:ma14="http://schemas.microsoft.com/office/mac/drawingml/2011/main" val="0"/>
             </a:ext>
           </a:extLst>
         </p:spPr>
@@ -13138,8 +13135,8 @@
         </p:blipFill>
         <p:spPr>
           <a:xfrm>
-            <a:off x="13652367" y="3459407"/>
-            <a:ext cx="3492633" cy="3819529"/>
+            <a:off x="13488735" y="3477575"/>
+            <a:ext cx="3793425" cy="3819529"/>
           </a:xfrm>
           <a:prstGeom prst="rect">
             <a:avLst/>
@@ -13778,7 +13775,7 @@
           </a:prstGeom>
           <a:extLst>
             <a:ext uri="{C572A759-6A51-4108-AA02-DFA0A04FC94B}">
-              <ma14:wrappingTextBoxFlag xmlns="" xmlns:ma14="http://schemas.microsoft.com/office/mac/drawingml/2011/main" val="0"/>
+              <ma14:wrappingTextBoxFlag xmlns:ma14="http://schemas.microsoft.com/office/mac/drawingml/2011/main" xmlns="" val="0"/>
             </a:ext>
           </a:extLst>
         </p:spPr>
@@ -14988,7 +14985,7 @@
           </a:prstGeom>
           <a:extLst>
             <a:ext uri="{C572A759-6A51-4108-AA02-DFA0A04FC94B}">
-              <ma14:wrappingTextBoxFlag xmlns:ma14="http://schemas.microsoft.com/office/mac/drawingml/2011/main" xmlns="" val="0"/>
+              <ma14:wrappingTextBoxFlag xmlns="" xmlns:ma14="http://schemas.microsoft.com/office/mac/drawingml/2011/main" val="0"/>
             </a:ext>
           </a:extLst>
         </p:spPr>
@@ -15774,7 +15771,7 @@
           </a:prstGeom>
           <a:extLst>
             <a:ext uri="{C572A759-6A51-4108-AA02-DFA0A04FC94B}">
-              <ma14:wrappingTextBoxFlag xmlns:ma14="http://schemas.microsoft.com/office/mac/drawingml/2011/main" xmlns="" val="0"/>
+              <ma14:wrappingTextBoxFlag xmlns="" xmlns:ma14="http://schemas.microsoft.com/office/mac/drawingml/2011/main" val="0"/>
             </a:ext>
           </a:extLst>
         </p:spPr>
@@ -15816,7 +15813,7 @@
         </p:nvSpPr>
         <p:spPr>
           <a:xfrm>
-            <a:off x="1425551" y="6547757"/>
+            <a:off x="7490369" y="6720839"/>
             <a:ext cx="3581400" cy="2006547"/>
           </a:xfrm>
           <a:prstGeom prst="roundRect">
@@ -15870,10 +15867,10 @@
       </p:sp>
       <p:sp>
         <p:nvSpPr>
-          <p:cNvPr id="40" name="Kaart">
-            <a:extLst>
-              <a:ext uri="{FF2B5EF4-FFF2-40B4-BE49-F238E27FC236}">
-                <a16:creationId xmlns:a16="http://schemas.microsoft.com/office/drawing/2014/main" id="{6226989A-FE54-45E6-E06F-677E366DBB54}"/>
+          <p:cNvPr id="42" name="Kaart">
+            <a:extLst>
+              <a:ext uri="{FF2B5EF4-FFF2-40B4-BE49-F238E27FC236}">
+                <a16:creationId xmlns:a16="http://schemas.microsoft.com/office/drawing/2014/main" id="{3DE2DB34-E208-A717-DA23-649DFF912261}"/>
               </a:ext>
             </a:extLst>
           </p:cNvPr>
@@ -15882,7 +15879,7 @@
         </p:nvSpPr>
         <p:spPr>
           <a:xfrm>
-            <a:off x="13022444" y="6520543"/>
+            <a:off x="11719424" y="6720840"/>
             <a:ext cx="3581400" cy="2006547"/>
           </a:xfrm>
           <a:prstGeom prst="roundRect">
@@ -15919,17 +15916,17 @@
                 <a:latin typeface="Cambria" panose="02040503050406030204" pitchFamily="18" charset="0"/>
                 <a:ea typeface="Cambria" panose="02040503050406030204" pitchFamily="18" charset="0"/>
               </a:rPr>
-              <a:t>3 kasutajarakendust</a:t>
-            </a:r>
-          </a:p>
-        </p:txBody>
-      </p:sp>
-      <p:sp>
-        <p:nvSpPr>
-          <p:cNvPr id="42" name="Kaart">
-            <a:extLst>
-              <a:ext uri="{FF2B5EF4-FFF2-40B4-BE49-F238E27FC236}">
-                <a16:creationId xmlns:a16="http://schemas.microsoft.com/office/drawing/2014/main" id="{3DE2DB34-E208-A717-DA23-649DFF912261}"/>
+              <a:t>2005-2026 vaatlusperiood</a:t>
+            </a:r>
+          </a:p>
+        </p:txBody>
+      </p:sp>
+      <p:sp>
+        <p:nvSpPr>
+          <p:cNvPr id="44" name="Kaart">
+            <a:extLst>
+              <a:ext uri="{FF2B5EF4-FFF2-40B4-BE49-F238E27FC236}">
+                <a16:creationId xmlns:a16="http://schemas.microsoft.com/office/drawing/2014/main" id="{59810C2E-DDC8-C6F9-453E-5490CACE6EB6}"/>
               </a:ext>
             </a:extLst>
           </p:cNvPr>
@@ -15938,63 +15935,7 @@
         </p:nvSpPr>
         <p:spPr>
           <a:xfrm>
-            <a:off x="5220381" y="6547757"/>
-            <a:ext cx="3581400" cy="2006547"/>
-          </a:xfrm>
-          <a:prstGeom prst="roundRect">
-            <a:avLst>
-              <a:gd name="adj" fmla="val 4706"/>
-            </a:avLst>
-          </a:prstGeom>
-          <a:noFill/>
-          <a:ln w="12700">
-            <a:solidFill>
-              <a:srgbClr val="F7F1E6"/>
-            </a:solidFill>
-            <a:prstDash val="solid"/>
-          </a:ln>
-          <a:effectLst>
-            <a:outerShdw blurRad="101600" dist="25400" dir="5400000" algn="bl" rotWithShape="0">
-              <a:srgbClr val="3A3025">
-                <a:alpha val="15000"/>
-              </a:srgbClr>
-            </a:outerShdw>
-          </a:effectLst>
-        </p:spPr>
-        <p:txBody>
-          <a:bodyPr/>
-          <a:lstStyle/>
-          <a:p>
-            <a:pPr algn="ctr"/>
-            <a:endParaRPr lang="et-EE" sz="2700" dirty="0"/>
-          </a:p>
-          <a:p>
-            <a:pPr algn="ctr"/>
-            <a:r>
-              <a:rPr lang="et-EE" sz="3000" b="1" dirty="0">
-                <a:latin typeface="Cambria" panose="02040503050406030204" pitchFamily="18" charset="0"/>
-                <a:ea typeface="Cambria" panose="02040503050406030204" pitchFamily="18" charset="0"/>
-              </a:rPr>
-              <a:t>2005-2026 vaatlusperiood</a:t>
-            </a:r>
-          </a:p>
-        </p:txBody>
-      </p:sp>
-      <p:sp>
-        <p:nvSpPr>
-          <p:cNvPr id="44" name="Kaart">
-            <a:extLst>
-              <a:ext uri="{FF2B5EF4-FFF2-40B4-BE49-F238E27FC236}">
-                <a16:creationId xmlns:a16="http://schemas.microsoft.com/office/drawing/2014/main" id="{59810C2E-DDC8-C6F9-453E-5490CACE6EB6}"/>
-              </a:ext>
-            </a:extLst>
-          </p:cNvPr>
-          <p:cNvSpPr/>
-          <p:nvPr/>
-        </p:nvSpPr>
-        <p:spPr>
-          <a:xfrm>
-            <a:off x="9121140" y="6547757"/>
+            <a:off x="3124200" y="6743700"/>
             <a:ext cx="3581400" cy="2006547"/>
           </a:xfrm>
           <a:prstGeom prst="roundRect">
@@ -17146,7 +17087,7 @@
           </a:prstGeom>
           <a:extLst>
             <a:ext uri="{C572A759-6A51-4108-AA02-DFA0A04FC94B}">
-              <ma14:wrappingTextBoxFlag xmlns:ma14="http://schemas.microsoft.com/office/mac/drawingml/2011/main" xmlns="" val="0"/>
+              <ma14:wrappingTextBoxFlag xmlns="" xmlns:ma14="http://schemas.microsoft.com/office/mac/drawingml/2011/main" val="0"/>
             </a:ext>
           </a:extLst>
         </p:spPr>
@@ -17949,7 +17890,7 @@
           </a:prstGeom>
           <a:extLst>
             <a:ext uri="{C572A759-6A51-4108-AA02-DFA0A04FC94B}">
-              <ma14:wrappingTextBoxFlag xmlns:ma14="http://schemas.microsoft.com/office/mac/drawingml/2011/main" xmlns="" val="0"/>
+              <ma14:wrappingTextBoxFlag xmlns="" xmlns:ma14="http://schemas.microsoft.com/office/mac/drawingml/2011/main" val="0"/>
             </a:ext>
           </a:extLst>
         </p:spPr>
@@ -20404,7 +20345,7 @@
           </a:prstGeom>
           <a:extLst>
             <a:ext uri="{C572A759-6A51-4108-AA02-DFA0A04FC94B}">
-              <ma14:wrappingTextBoxFlag xmlns:ma14="http://schemas.microsoft.com/office/mac/drawingml/2011/main" xmlns="" val="0"/>
+              <ma14:wrappingTextBoxFlag xmlns="" xmlns:ma14="http://schemas.microsoft.com/office/mac/drawingml/2011/main" val="0"/>
             </a:ext>
           </a:extLst>
         </p:spPr>
@@ -21171,7 +21112,7 @@
           </a:prstGeom>
           <a:extLst>
             <a:ext uri="{C572A759-6A51-4108-AA02-DFA0A04FC94B}">
-              <ma14:wrappingTextBoxFlag xmlns="" xmlns:ma14="http://schemas.microsoft.com/office/mac/drawingml/2011/main" val="0"/>
+              <ma14:wrappingTextBoxFlag xmlns:ma14="http://schemas.microsoft.com/office/mac/drawingml/2011/main" xmlns="" val="0"/>
             </a:ext>
           </a:extLst>
         </p:spPr>
